--- a/仕様書.pptx
+++ b/仕様書.pptx
@@ -8,6 +8,9 @@
     <p:sldId id="256" r:id="rId2"/>
     <p:sldId id="257" r:id="rId3"/>
     <p:sldId id="259" r:id="rId4"/>
+    <p:sldId id="262" r:id="rId5"/>
+    <p:sldId id="260" r:id="rId6"/>
+    <p:sldId id="261" r:id="rId7"/>
   </p:sldIdLst>
   <p:sldSz cx="12192000" cy="6858000"/>
   <p:notesSz cx="6858000" cy="9144000"/>
@@ -106,6 +109,11 @@
       </a:defRPr>
     </a:lvl9pPr>
   </p:defaultTextStyle>
+  <p:extLst>
+    <p:ext uri="{EFAFB233-063F-42B5-8137-9DF3F51BA10A}">
+      <p15:sldGuideLst xmlns:p15="http://schemas.microsoft.com/office/powerpoint/2012/main"/>
+    </p:ext>
+  </p:extLst>
 </p:presentation>
 </file>
 
@@ -256,7 +264,7 @@
           <a:p>
             <a:fld id="{4F5E06EF-2D54-44E0-8F34-46D58B6F580D}" type="datetimeFigureOut">
               <a:rPr kumimoji="1" lang="ja-JP" altLang="en-US" smtClean="0"/>
-              <a:t>2025/11/26</a:t>
+              <a:t>2026/1/21</a:t>
             </a:fld>
             <a:endParaRPr kumimoji="1" lang="ja-JP" altLang="en-US"/>
           </a:p>
@@ -486,7 +494,7 @@
           <a:p>
             <a:fld id="{4F5E06EF-2D54-44E0-8F34-46D58B6F580D}" type="datetimeFigureOut">
               <a:rPr kumimoji="1" lang="ja-JP" altLang="en-US" smtClean="0"/>
-              <a:t>2025/11/26</a:t>
+              <a:t>2026/1/21</a:t>
             </a:fld>
             <a:endParaRPr kumimoji="1" lang="ja-JP" altLang="en-US"/>
           </a:p>
@@ -726,7 +734,7 @@
           <a:p>
             <a:fld id="{4F5E06EF-2D54-44E0-8F34-46D58B6F580D}" type="datetimeFigureOut">
               <a:rPr kumimoji="1" lang="ja-JP" altLang="en-US" smtClean="0"/>
-              <a:t>2025/11/26</a:t>
+              <a:t>2026/1/21</a:t>
             </a:fld>
             <a:endParaRPr kumimoji="1" lang="ja-JP" altLang="en-US"/>
           </a:p>
@@ -956,7 +964,7 @@
           <a:p>
             <a:fld id="{4F5E06EF-2D54-44E0-8F34-46D58B6F580D}" type="datetimeFigureOut">
               <a:rPr kumimoji="1" lang="ja-JP" altLang="en-US" smtClean="0"/>
-              <a:t>2025/11/26</a:t>
+              <a:t>2026/1/21</a:t>
             </a:fld>
             <a:endParaRPr kumimoji="1" lang="ja-JP" altLang="en-US"/>
           </a:p>
@@ -1231,7 +1239,7 @@
           <a:p>
             <a:fld id="{4F5E06EF-2D54-44E0-8F34-46D58B6F580D}" type="datetimeFigureOut">
               <a:rPr kumimoji="1" lang="ja-JP" altLang="en-US" smtClean="0"/>
-              <a:t>2025/11/26</a:t>
+              <a:t>2026/1/21</a:t>
             </a:fld>
             <a:endParaRPr kumimoji="1" lang="ja-JP" altLang="en-US"/>
           </a:p>
@@ -1560,7 +1568,7 @@
           <a:p>
             <a:fld id="{4F5E06EF-2D54-44E0-8F34-46D58B6F580D}" type="datetimeFigureOut">
               <a:rPr kumimoji="1" lang="ja-JP" altLang="en-US" smtClean="0"/>
-              <a:t>2025/11/26</a:t>
+              <a:t>2026/1/21</a:t>
             </a:fld>
             <a:endParaRPr kumimoji="1" lang="ja-JP" altLang="en-US"/>
           </a:p>
@@ -2036,7 +2044,7 @@
           <a:p>
             <a:fld id="{4F5E06EF-2D54-44E0-8F34-46D58B6F580D}" type="datetimeFigureOut">
               <a:rPr kumimoji="1" lang="ja-JP" altLang="en-US" smtClean="0"/>
-              <a:t>2025/11/26</a:t>
+              <a:t>2026/1/21</a:t>
             </a:fld>
             <a:endParaRPr kumimoji="1" lang="ja-JP" altLang="en-US"/>
           </a:p>
@@ -2177,7 +2185,7 @@
           <a:p>
             <a:fld id="{4F5E06EF-2D54-44E0-8F34-46D58B6F580D}" type="datetimeFigureOut">
               <a:rPr kumimoji="1" lang="ja-JP" altLang="en-US" smtClean="0"/>
-              <a:t>2025/11/26</a:t>
+              <a:t>2026/1/21</a:t>
             </a:fld>
             <a:endParaRPr kumimoji="1" lang="ja-JP" altLang="en-US"/>
           </a:p>
@@ -2290,7 +2298,7 @@
           <a:p>
             <a:fld id="{4F5E06EF-2D54-44E0-8F34-46D58B6F580D}" type="datetimeFigureOut">
               <a:rPr kumimoji="1" lang="ja-JP" altLang="en-US" smtClean="0"/>
-              <a:t>2025/11/26</a:t>
+              <a:t>2026/1/21</a:t>
             </a:fld>
             <a:endParaRPr kumimoji="1" lang="ja-JP" altLang="en-US"/>
           </a:p>
@@ -2633,7 +2641,7 @@
           <a:p>
             <a:fld id="{4F5E06EF-2D54-44E0-8F34-46D58B6F580D}" type="datetimeFigureOut">
               <a:rPr kumimoji="1" lang="ja-JP" altLang="en-US" smtClean="0"/>
-              <a:t>2025/11/26</a:t>
+              <a:t>2026/1/21</a:t>
             </a:fld>
             <a:endParaRPr kumimoji="1" lang="ja-JP" altLang="en-US"/>
           </a:p>
@@ -2921,7 +2929,7 @@
           <a:p>
             <a:fld id="{4F5E06EF-2D54-44E0-8F34-46D58B6F580D}" type="datetimeFigureOut">
               <a:rPr kumimoji="1" lang="ja-JP" altLang="en-US" smtClean="0"/>
-              <a:t>2025/11/26</a:t>
+              <a:t>2026/1/21</a:t>
             </a:fld>
             <a:endParaRPr kumimoji="1" lang="ja-JP" altLang="en-US"/>
           </a:p>
@@ -3194,7 +3202,7 @@
           <a:p>
             <a:fld id="{4F5E06EF-2D54-44E0-8F34-46D58B6F580D}" type="datetimeFigureOut">
               <a:rPr kumimoji="1" lang="ja-JP" altLang="en-US" smtClean="0"/>
-              <a:t>2025/11/26</a:t>
+              <a:t>2026/1/21</a:t>
             </a:fld>
             <a:endParaRPr kumimoji="1" lang="ja-JP" altLang="en-US"/>
           </a:p>
@@ -3929,6 +3937,495 @@
     <p:extLst>
       <p:ext uri="{BB962C8B-B14F-4D97-AF65-F5344CB8AC3E}">
         <p14:creationId xmlns:p14="http://schemas.microsoft.com/office/powerpoint/2010/main" val="1962472455"/>
+      </p:ext>
+    </p:extLst>
+  </p:cSld>
+  <p:clrMapOvr>
+    <a:masterClrMapping/>
+  </p:clrMapOvr>
+</p:sld>
+</file>
+
+<file path=ppt/slides/slide4.xml><?xml version="1.0" encoding="utf-8"?>
+<p:sld xmlns:a="http://schemas.openxmlformats.org/drawingml/2006/main" xmlns:r="http://schemas.openxmlformats.org/officeDocument/2006/relationships" xmlns:p="http://schemas.openxmlformats.org/presentationml/2006/main">
+  <p:cSld>
+    <p:spTree>
+      <p:nvGrpSpPr>
+        <p:cNvPr id="1" name=""/>
+        <p:cNvGrpSpPr/>
+        <p:nvPr/>
+      </p:nvGrpSpPr>
+      <p:grpSpPr>
+        <a:xfrm>
+          <a:off x="0" y="0"/>
+          <a:ext cx="0" cy="0"/>
+          <a:chOff x="0" y="0"/>
+          <a:chExt cx="0" cy="0"/>
+        </a:xfrm>
+      </p:grpSpPr>
+      <p:sp>
+        <p:nvSpPr>
+          <p:cNvPr id="2" name="タイトル 1">
+            <a:extLst>
+              <a:ext uri="{FF2B5EF4-FFF2-40B4-BE49-F238E27FC236}">
+                <a16:creationId xmlns:a16="http://schemas.microsoft.com/office/drawing/2014/main" id="{0F524656-89B5-B76D-7140-505F1B3A1679}"/>
+              </a:ext>
+            </a:extLst>
+          </p:cNvPr>
+          <p:cNvSpPr>
+            <a:spLocks noGrp="1"/>
+          </p:cNvSpPr>
+          <p:nvPr>
+            <p:ph type="title"/>
+          </p:nvPr>
+        </p:nvSpPr>
+        <p:spPr/>
+        <p:txBody>
+          <a:bodyPr/>
+          <a:lstStyle/>
+          <a:p>
+            <a:r>
+              <a:rPr kumimoji="1" lang="ja-JP" altLang="en-US" dirty="0"/>
+              <a:t>画面遷移</a:t>
+            </a:r>
+          </a:p>
+        </p:txBody>
+      </p:sp>
+      <p:sp>
+        <p:nvSpPr>
+          <p:cNvPr id="4" name="正方形/長方形 3">
+            <a:extLst>
+              <a:ext uri="{FF2B5EF4-FFF2-40B4-BE49-F238E27FC236}">
+                <a16:creationId xmlns:a16="http://schemas.microsoft.com/office/drawing/2014/main" id="{A372E9C5-55F2-C00A-F739-90512C1E586C}"/>
+              </a:ext>
+            </a:extLst>
+          </p:cNvPr>
+          <p:cNvSpPr/>
+          <p:nvPr/>
+        </p:nvSpPr>
+        <p:spPr>
+          <a:xfrm>
+            <a:off x="1048215" y="2709746"/>
+            <a:ext cx="2865863" cy="719254"/>
+          </a:xfrm>
+          <a:prstGeom prst="rect">
+            <a:avLst/>
+          </a:prstGeom>
+        </p:spPr>
+        <p:style>
+          <a:lnRef idx="2">
+            <a:schemeClr val="dk1"/>
+          </a:lnRef>
+          <a:fillRef idx="1">
+            <a:schemeClr val="lt1"/>
+          </a:fillRef>
+          <a:effectRef idx="0">
+            <a:schemeClr val="dk1"/>
+          </a:effectRef>
+          <a:fontRef idx="minor">
+            <a:schemeClr val="dk1"/>
+          </a:fontRef>
+        </p:style>
+        <p:txBody>
+          <a:bodyPr rtlCol="0" anchor="ctr"/>
+          <a:lstStyle/>
+          <a:p>
+            <a:pPr algn="ctr"/>
+            <a:r>
+              <a:rPr kumimoji="1" lang="ja-JP" altLang="en-US" dirty="0"/>
+              <a:t>飲んだ数カウント</a:t>
+            </a:r>
+          </a:p>
+        </p:txBody>
+      </p:sp>
+      <p:sp>
+        <p:nvSpPr>
+          <p:cNvPr id="5" name="正方形/長方形 4">
+            <a:extLst>
+              <a:ext uri="{FF2B5EF4-FFF2-40B4-BE49-F238E27FC236}">
+                <a16:creationId xmlns:a16="http://schemas.microsoft.com/office/drawing/2014/main" id="{EA66B7D5-9CE3-2044-182F-D9770FE60FA1}"/>
+              </a:ext>
+            </a:extLst>
+          </p:cNvPr>
+          <p:cNvSpPr/>
+          <p:nvPr/>
+        </p:nvSpPr>
+        <p:spPr>
+          <a:xfrm>
+            <a:off x="8277922" y="2709746"/>
+            <a:ext cx="2865863" cy="719254"/>
+          </a:xfrm>
+          <a:prstGeom prst="rect">
+            <a:avLst/>
+          </a:prstGeom>
+        </p:spPr>
+        <p:style>
+          <a:lnRef idx="2">
+            <a:schemeClr val="dk1"/>
+          </a:lnRef>
+          <a:fillRef idx="1">
+            <a:schemeClr val="lt1"/>
+          </a:fillRef>
+          <a:effectRef idx="0">
+            <a:schemeClr val="dk1"/>
+          </a:effectRef>
+          <a:fontRef idx="minor">
+            <a:schemeClr val="dk1"/>
+          </a:fontRef>
+        </p:style>
+        <p:txBody>
+          <a:bodyPr rtlCol="0" anchor="ctr"/>
+          <a:lstStyle/>
+          <a:p>
+            <a:pPr algn="ctr"/>
+            <a:r>
+              <a:rPr kumimoji="1" lang="ja-JP" altLang="en-US" dirty="0"/>
+              <a:t>飲んだ数カレンダー</a:t>
+            </a:r>
+          </a:p>
+        </p:txBody>
+      </p:sp>
+      <p:sp>
+        <p:nvSpPr>
+          <p:cNvPr id="6" name="矢印: 右 5">
+            <a:extLst>
+              <a:ext uri="{FF2B5EF4-FFF2-40B4-BE49-F238E27FC236}">
+                <a16:creationId xmlns:a16="http://schemas.microsoft.com/office/drawing/2014/main" id="{00C5F51C-F732-6C61-A5B8-78C97BCF09C6}"/>
+              </a:ext>
+            </a:extLst>
+          </p:cNvPr>
+          <p:cNvSpPr/>
+          <p:nvPr/>
+        </p:nvSpPr>
+        <p:spPr>
+          <a:xfrm>
+            <a:off x="5390508" y="2709746"/>
+            <a:ext cx="1407559" cy="801384"/>
+          </a:xfrm>
+          <a:prstGeom prst="rightArrow">
+            <a:avLst/>
+          </a:prstGeom>
+        </p:spPr>
+        <p:style>
+          <a:lnRef idx="2">
+            <a:schemeClr val="dk1">
+              <a:shade val="15000"/>
+            </a:schemeClr>
+          </a:lnRef>
+          <a:fillRef idx="1">
+            <a:schemeClr val="dk1"/>
+          </a:fillRef>
+          <a:effectRef idx="0">
+            <a:schemeClr val="dk1"/>
+          </a:effectRef>
+          <a:fontRef idx="minor">
+            <a:schemeClr val="lt1"/>
+          </a:fontRef>
+        </p:style>
+        <p:txBody>
+          <a:bodyPr rtlCol="0" anchor="ctr"/>
+          <a:lstStyle/>
+          <a:p>
+            <a:pPr algn="ctr"/>
+            <a:endParaRPr kumimoji="1" lang="ja-JP" altLang="en-US"/>
+          </a:p>
+        </p:txBody>
+      </p:sp>
+    </p:spTree>
+    <p:extLst>
+      <p:ext uri="{BB962C8B-B14F-4D97-AF65-F5344CB8AC3E}">
+        <p14:creationId xmlns:p14="http://schemas.microsoft.com/office/powerpoint/2010/main" val="1474642370"/>
+      </p:ext>
+    </p:extLst>
+  </p:cSld>
+  <p:clrMapOvr>
+    <a:masterClrMapping/>
+  </p:clrMapOvr>
+</p:sld>
+</file>
+
+<file path=ppt/slides/slide5.xml><?xml version="1.0" encoding="utf-8"?>
+<p:sld xmlns:a="http://schemas.openxmlformats.org/drawingml/2006/main" xmlns:r="http://schemas.openxmlformats.org/officeDocument/2006/relationships" xmlns:p="http://schemas.openxmlformats.org/presentationml/2006/main">
+  <p:cSld>
+    <p:spTree>
+      <p:nvGrpSpPr>
+        <p:cNvPr id="1" name=""/>
+        <p:cNvGrpSpPr/>
+        <p:nvPr/>
+      </p:nvGrpSpPr>
+      <p:grpSpPr>
+        <a:xfrm>
+          <a:off x="0" y="0"/>
+          <a:ext cx="0" cy="0"/>
+          <a:chOff x="0" y="0"/>
+          <a:chExt cx="0" cy="0"/>
+        </a:xfrm>
+      </p:grpSpPr>
+      <p:pic>
+        <p:nvPicPr>
+          <p:cNvPr id="5" name="図 4" descr="グラフィカル ユーザー インターフェイス&#10;&#10;AI 生成コンテンツは誤りを含む可能性があります。">
+            <a:extLst>
+              <a:ext uri="{FF2B5EF4-FFF2-40B4-BE49-F238E27FC236}">
+                <a16:creationId xmlns:a16="http://schemas.microsoft.com/office/drawing/2014/main" id="{C708692A-426A-9603-97C9-A7A0BB23F7C3}"/>
+              </a:ext>
+            </a:extLst>
+          </p:cNvPr>
+          <p:cNvPicPr>
+            <a:picLocks noChangeAspect="1"/>
+          </p:cNvPicPr>
+          <p:nvPr/>
+        </p:nvPicPr>
+        <p:blipFill>
+          <a:blip r:embed="rId2"/>
+          <a:stretch>
+            <a:fillRect/>
+          </a:stretch>
+        </p:blipFill>
+        <p:spPr>
+          <a:xfrm>
+            <a:off x="0" y="1390"/>
+            <a:ext cx="12192000" cy="6855220"/>
+          </a:xfrm>
+          <a:prstGeom prst="rect">
+            <a:avLst/>
+          </a:prstGeom>
+        </p:spPr>
+      </p:pic>
+      <p:sp>
+        <p:nvSpPr>
+          <p:cNvPr id="6" name="テキスト ボックス 5">
+            <a:extLst>
+              <a:ext uri="{FF2B5EF4-FFF2-40B4-BE49-F238E27FC236}">
+                <a16:creationId xmlns:a16="http://schemas.microsoft.com/office/drawing/2014/main" id="{01741194-EDDB-5416-3721-390CE9DD5335}"/>
+              </a:ext>
+            </a:extLst>
+          </p:cNvPr>
+          <p:cNvSpPr txBox="1"/>
+          <p:nvPr/>
+        </p:nvSpPr>
+        <p:spPr>
+          <a:xfrm>
+            <a:off x="7203688" y="4036741"/>
+            <a:ext cx="2723823" cy="369332"/>
+          </a:xfrm>
+          <a:prstGeom prst="rect">
+            <a:avLst/>
+          </a:prstGeom>
+          <a:noFill/>
+        </p:spPr>
+        <p:txBody>
+          <a:bodyPr wrap="none" rtlCol="0">
+            <a:spAutoFit/>
+          </a:bodyPr>
+          <a:lstStyle/>
+          <a:p>
+            <a:r>
+              <a:rPr kumimoji="1" lang="ja-JP" altLang="en-US" dirty="0"/>
+              <a:t>①飲んだ</a:t>
+            </a:r>
+            <a:r>
+              <a:rPr lang="ja-JP" altLang="en-US" dirty="0"/>
+              <a:t>杯数</a:t>
+            </a:r>
+            <a:r>
+              <a:rPr kumimoji="1" lang="ja-JP" altLang="en-US" dirty="0"/>
+              <a:t>を増やせる</a:t>
+            </a:r>
+          </a:p>
+        </p:txBody>
+      </p:sp>
+      <p:sp>
+        <p:nvSpPr>
+          <p:cNvPr id="7" name="テキスト ボックス 6">
+            <a:extLst>
+              <a:ext uri="{FF2B5EF4-FFF2-40B4-BE49-F238E27FC236}">
+                <a16:creationId xmlns:a16="http://schemas.microsoft.com/office/drawing/2014/main" id="{F6331408-7B62-9744-2DBF-C60408C92E2A}"/>
+              </a:ext>
+            </a:extLst>
+          </p:cNvPr>
+          <p:cNvSpPr txBox="1"/>
+          <p:nvPr/>
+        </p:nvSpPr>
+        <p:spPr>
+          <a:xfrm>
+            <a:off x="7203687" y="4624039"/>
+            <a:ext cx="2031325" cy="369332"/>
+          </a:xfrm>
+          <a:prstGeom prst="rect">
+            <a:avLst/>
+          </a:prstGeom>
+          <a:noFill/>
+        </p:spPr>
+        <p:txBody>
+          <a:bodyPr wrap="none" rtlCol="0">
+            <a:spAutoFit/>
+          </a:bodyPr>
+          <a:lstStyle/>
+          <a:p>
+            <a:r>
+              <a:rPr lang="ja-JP" altLang="en-US" dirty="0"/>
+              <a:t>②杯数をリセット</a:t>
+            </a:r>
+            <a:endParaRPr kumimoji="1" lang="ja-JP" altLang="en-US" dirty="0"/>
+          </a:p>
+        </p:txBody>
+      </p:sp>
+      <p:sp>
+        <p:nvSpPr>
+          <p:cNvPr id="8" name="テキスト ボックス 7">
+            <a:extLst>
+              <a:ext uri="{FF2B5EF4-FFF2-40B4-BE49-F238E27FC236}">
+                <a16:creationId xmlns:a16="http://schemas.microsoft.com/office/drawing/2014/main" id="{A586D9BA-84E9-E6CD-CEE4-CC0070ADD9CD}"/>
+              </a:ext>
+            </a:extLst>
+          </p:cNvPr>
+          <p:cNvSpPr txBox="1"/>
+          <p:nvPr/>
+        </p:nvSpPr>
+        <p:spPr>
+          <a:xfrm>
+            <a:off x="7261245" y="6114586"/>
+            <a:ext cx="3185487" cy="369332"/>
+          </a:xfrm>
+          <a:prstGeom prst="rect">
+            <a:avLst/>
+          </a:prstGeom>
+          <a:noFill/>
+        </p:spPr>
+        <p:txBody>
+          <a:bodyPr wrap="none" rtlCol="0">
+            <a:spAutoFit/>
+          </a:bodyPr>
+          <a:lstStyle/>
+          <a:p>
+            <a:r>
+              <a:rPr lang="ja-JP" altLang="en-US" dirty="0"/>
+              <a:t>③飲んだ数カレンダーへ遷移</a:t>
+            </a:r>
+            <a:endParaRPr kumimoji="1" lang="ja-JP" altLang="en-US" dirty="0"/>
+          </a:p>
+        </p:txBody>
+      </p:sp>
+    </p:spTree>
+    <p:extLst>
+      <p:ext uri="{BB962C8B-B14F-4D97-AF65-F5344CB8AC3E}">
+        <p14:creationId xmlns:p14="http://schemas.microsoft.com/office/powerpoint/2010/main" val="664345904"/>
+      </p:ext>
+    </p:extLst>
+  </p:cSld>
+  <p:clrMapOvr>
+    <a:masterClrMapping/>
+  </p:clrMapOvr>
+</p:sld>
+</file>
+
+<file path=ppt/slides/slide6.xml><?xml version="1.0" encoding="utf-8"?>
+<p:sld xmlns:a="http://schemas.openxmlformats.org/drawingml/2006/main" xmlns:r="http://schemas.openxmlformats.org/officeDocument/2006/relationships" xmlns:p="http://schemas.openxmlformats.org/presentationml/2006/main">
+  <p:cSld>
+    <p:spTree>
+      <p:nvGrpSpPr>
+        <p:cNvPr id="1" name=""/>
+        <p:cNvGrpSpPr/>
+        <p:nvPr/>
+      </p:nvGrpSpPr>
+      <p:grpSpPr>
+        <a:xfrm>
+          <a:off x="0" y="0"/>
+          <a:ext cx="0" cy="0"/>
+          <a:chOff x="0" y="0"/>
+          <a:chExt cx="0" cy="0"/>
+        </a:xfrm>
+      </p:grpSpPr>
+      <p:pic>
+        <p:nvPicPr>
+          <p:cNvPr id="8" name="図 7" descr="テーブル&#10;&#10;AI 生成コンテンツは誤りを含む可能性があります。">
+            <a:extLst>
+              <a:ext uri="{FF2B5EF4-FFF2-40B4-BE49-F238E27FC236}">
+                <a16:creationId xmlns:a16="http://schemas.microsoft.com/office/drawing/2014/main" id="{6D1FA6F1-7F78-33A2-922C-E98D7EC6DC7A}"/>
+              </a:ext>
+            </a:extLst>
+          </p:cNvPr>
+          <p:cNvPicPr>
+            <a:picLocks noChangeAspect="1"/>
+          </p:cNvPicPr>
+          <p:nvPr/>
+        </p:nvPicPr>
+        <p:blipFill>
+          <a:blip r:embed="rId2"/>
+          <a:stretch>
+            <a:fillRect/>
+          </a:stretch>
+        </p:blipFill>
+        <p:spPr>
+          <a:xfrm>
+            <a:off x="0" y="1390"/>
+            <a:ext cx="12192000" cy="6855220"/>
+          </a:xfrm>
+          <a:prstGeom prst="rect">
+            <a:avLst/>
+          </a:prstGeom>
+        </p:spPr>
+      </p:pic>
+      <p:sp>
+        <p:nvSpPr>
+          <p:cNvPr id="6" name="テキスト ボックス 5">
+            <a:extLst>
+              <a:ext uri="{FF2B5EF4-FFF2-40B4-BE49-F238E27FC236}">
+                <a16:creationId xmlns:a16="http://schemas.microsoft.com/office/drawing/2014/main" id="{76E8E8BD-F481-4D65-A059-23D30B7654A4}"/>
+              </a:ext>
+            </a:extLst>
+          </p:cNvPr>
+          <p:cNvSpPr txBox="1"/>
+          <p:nvPr/>
+        </p:nvSpPr>
+        <p:spPr>
+          <a:xfrm>
+            <a:off x="7393259" y="5486400"/>
+            <a:ext cx="4801314" cy="1200329"/>
+          </a:xfrm>
+          <a:prstGeom prst="rect">
+            <a:avLst/>
+          </a:prstGeom>
+          <a:noFill/>
+        </p:spPr>
+        <p:txBody>
+          <a:bodyPr wrap="none" rtlCol="0">
+            <a:spAutoFit/>
+          </a:bodyPr>
+          <a:lstStyle/>
+          <a:p>
+            <a:r>
+              <a:rPr kumimoji="1" lang="ja-JP" altLang="en-US" dirty="0"/>
+              <a:t>・日付ごとの飲んだ数を表示</a:t>
+            </a:r>
+            <a:endParaRPr kumimoji="1" lang="en-US" altLang="ja-JP" dirty="0"/>
+          </a:p>
+          <a:p>
+            <a:r>
+              <a:rPr kumimoji="1" lang="ja-JP" altLang="en-US" dirty="0"/>
+              <a:t>・保存機能は未実装</a:t>
+            </a:r>
+            <a:endParaRPr kumimoji="1" lang="en-US" altLang="ja-JP" dirty="0"/>
+          </a:p>
+          <a:p>
+            <a:r>
+              <a:rPr lang="ja-JP" altLang="en-US" dirty="0"/>
+              <a:t>・カウントページでカウントした当日の杯数</a:t>
+            </a:r>
+            <a:endParaRPr lang="en-US" altLang="ja-JP" dirty="0"/>
+          </a:p>
+          <a:p>
+            <a:r>
+              <a:rPr kumimoji="1" lang="ja-JP" altLang="en-US" dirty="0"/>
+              <a:t>　は表示可能</a:t>
+            </a:r>
+          </a:p>
+        </p:txBody>
+      </p:sp>
+    </p:spTree>
+    <p:extLst>
+      <p:ext uri="{BB962C8B-B14F-4D97-AF65-F5344CB8AC3E}">
+        <p14:creationId xmlns:p14="http://schemas.microsoft.com/office/powerpoint/2010/main" val="348216381"/>
       </p:ext>
     </p:extLst>
   </p:cSld>

--- a/仕様書.pptx
+++ b/仕様書.pptx
@@ -11,6 +11,7 @@
     <p:sldId id="262" r:id="rId5"/>
     <p:sldId id="260" r:id="rId6"/>
     <p:sldId id="261" r:id="rId7"/>
+    <p:sldId id="263" r:id="rId8"/>
   </p:sldIdLst>
   <p:sldSz cx="12192000" cy="6858000"/>
   <p:notesSz cx="6858000" cy="9144000"/>
@@ -264,7 +265,7 @@
           <a:p>
             <a:fld id="{4F5E06EF-2D54-44E0-8F34-46D58B6F580D}" type="datetimeFigureOut">
               <a:rPr kumimoji="1" lang="ja-JP" altLang="en-US" smtClean="0"/>
-              <a:t>2026/1/21</a:t>
+              <a:t>2026/5/13</a:t>
             </a:fld>
             <a:endParaRPr kumimoji="1" lang="ja-JP" altLang="en-US"/>
           </a:p>
@@ -494,7 +495,7 @@
           <a:p>
             <a:fld id="{4F5E06EF-2D54-44E0-8F34-46D58B6F580D}" type="datetimeFigureOut">
               <a:rPr kumimoji="1" lang="ja-JP" altLang="en-US" smtClean="0"/>
-              <a:t>2026/1/21</a:t>
+              <a:t>2026/5/13</a:t>
             </a:fld>
             <a:endParaRPr kumimoji="1" lang="ja-JP" altLang="en-US"/>
           </a:p>
@@ -734,7 +735,7 @@
           <a:p>
             <a:fld id="{4F5E06EF-2D54-44E0-8F34-46D58B6F580D}" type="datetimeFigureOut">
               <a:rPr kumimoji="1" lang="ja-JP" altLang="en-US" smtClean="0"/>
-              <a:t>2026/1/21</a:t>
+              <a:t>2026/5/13</a:t>
             </a:fld>
             <a:endParaRPr kumimoji="1" lang="ja-JP" altLang="en-US"/>
           </a:p>
@@ -964,7 +965,7 @@
           <a:p>
             <a:fld id="{4F5E06EF-2D54-44E0-8F34-46D58B6F580D}" type="datetimeFigureOut">
               <a:rPr kumimoji="1" lang="ja-JP" altLang="en-US" smtClean="0"/>
-              <a:t>2026/1/21</a:t>
+              <a:t>2026/5/13</a:t>
             </a:fld>
             <a:endParaRPr kumimoji="1" lang="ja-JP" altLang="en-US"/>
           </a:p>
@@ -1239,7 +1240,7 @@
           <a:p>
             <a:fld id="{4F5E06EF-2D54-44E0-8F34-46D58B6F580D}" type="datetimeFigureOut">
               <a:rPr kumimoji="1" lang="ja-JP" altLang="en-US" smtClean="0"/>
-              <a:t>2026/1/21</a:t>
+              <a:t>2026/5/13</a:t>
             </a:fld>
             <a:endParaRPr kumimoji="1" lang="ja-JP" altLang="en-US"/>
           </a:p>
@@ -1568,7 +1569,7 @@
           <a:p>
             <a:fld id="{4F5E06EF-2D54-44E0-8F34-46D58B6F580D}" type="datetimeFigureOut">
               <a:rPr kumimoji="1" lang="ja-JP" altLang="en-US" smtClean="0"/>
-              <a:t>2026/1/21</a:t>
+              <a:t>2026/5/13</a:t>
             </a:fld>
             <a:endParaRPr kumimoji="1" lang="ja-JP" altLang="en-US"/>
           </a:p>
@@ -2044,7 +2045,7 @@
           <a:p>
             <a:fld id="{4F5E06EF-2D54-44E0-8F34-46D58B6F580D}" type="datetimeFigureOut">
               <a:rPr kumimoji="1" lang="ja-JP" altLang="en-US" smtClean="0"/>
-              <a:t>2026/1/21</a:t>
+              <a:t>2026/5/13</a:t>
             </a:fld>
             <a:endParaRPr kumimoji="1" lang="ja-JP" altLang="en-US"/>
           </a:p>
@@ -2185,7 +2186,7 @@
           <a:p>
             <a:fld id="{4F5E06EF-2D54-44E0-8F34-46D58B6F580D}" type="datetimeFigureOut">
               <a:rPr kumimoji="1" lang="ja-JP" altLang="en-US" smtClean="0"/>
-              <a:t>2026/1/21</a:t>
+              <a:t>2026/5/13</a:t>
             </a:fld>
             <a:endParaRPr kumimoji="1" lang="ja-JP" altLang="en-US"/>
           </a:p>
@@ -2298,7 +2299,7 @@
           <a:p>
             <a:fld id="{4F5E06EF-2D54-44E0-8F34-46D58B6F580D}" type="datetimeFigureOut">
               <a:rPr kumimoji="1" lang="ja-JP" altLang="en-US" smtClean="0"/>
-              <a:t>2026/1/21</a:t>
+              <a:t>2026/5/13</a:t>
             </a:fld>
             <a:endParaRPr kumimoji="1" lang="ja-JP" altLang="en-US"/>
           </a:p>
@@ -2641,7 +2642,7 @@
           <a:p>
             <a:fld id="{4F5E06EF-2D54-44E0-8F34-46D58B6F580D}" type="datetimeFigureOut">
               <a:rPr kumimoji="1" lang="ja-JP" altLang="en-US" smtClean="0"/>
-              <a:t>2026/1/21</a:t>
+              <a:t>2026/5/13</a:t>
             </a:fld>
             <a:endParaRPr kumimoji="1" lang="ja-JP" altLang="en-US"/>
           </a:p>
@@ -2929,7 +2930,7 @@
           <a:p>
             <a:fld id="{4F5E06EF-2D54-44E0-8F34-46D58B6F580D}" type="datetimeFigureOut">
               <a:rPr kumimoji="1" lang="ja-JP" altLang="en-US" smtClean="0"/>
-              <a:t>2026/1/21</a:t>
+              <a:t>2026/5/13</a:t>
             </a:fld>
             <a:endParaRPr kumimoji="1" lang="ja-JP" altLang="en-US"/>
           </a:p>
@@ -3202,7 +3203,7 @@
           <a:p>
             <a:fld id="{4F5E06EF-2D54-44E0-8F34-46D58B6F580D}" type="datetimeFigureOut">
               <a:rPr kumimoji="1" lang="ja-JP" altLang="en-US" smtClean="0"/>
-              <a:t>2026/1/21</a:t>
+              <a:t>2026/5/13</a:t>
             </a:fld>
             <a:endParaRPr kumimoji="1" lang="ja-JP" altLang="en-US"/>
           </a:p>
@@ -4426,6 +4427,131 @@
     <p:extLst>
       <p:ext uri="{BB962C8B-B14F-4D97-AF65-F5344CB8AC3E}">
         <p14:creationId xmlns:p14="http://schemas.microsoft.com/office/powerpoint/2010/main" val="348216381"/>
+      </p:ext>
+    </p:extLst>
+  </p:cSld>
+  <p:clrMapOvr>
+    <a:masterClrMapping/>
+  </p:clrMapOvr>
+</p:sld>
+</file>
+
+<file path=ppt/slides/slide7.xml><?xml version="1.0" encoding="utf-8"?>
+<p:sld xmlns:a="http://schemas.openxmlformats.org/drawingml/2006/main" xmlns:r="http://schemas.openxmlformats.org/officeDocument/2006/relationships" xmlns:p="http://schemas.openxmlformats.org/presentationml/2006/main">
+  <p:cSld>
+    <p:spTree>
+      <p:nvGrpSpPr>
+        <p:cNvPr id="1" name=""/>
+        <p:cNvGrpSpPr/>
+        <p:nvPr/>
+      </p:nvGrpSpPr>
+      <p:grpSpPr>
+        <a:xfrm>
+          <a:off x="0" y="0"/>
+          <a:ext cx="0" cy="0"/>
+          <a:chOff x="0" y="0"/>
+          <a:chExt cx="0" cy="0"/>
+        </a:xfrm>
+      </p:grpSpPr>
+      <p:sp>
+        <p:nvSpPr>
+          <p:cNvPr id="2" name="タイトル 1">
+            <a:extLst>
+              <a:ext uri="{FF2B5EF4-FFF2-40B4-BE49-F238E27FC236}">
+                <a16:creationId xmlns:a16="http://schemas.microsoft.com/office/drawing/2014/main" id="{63F32126-8B08-0AF6-F52F-3932C2059430}"/>
+              </a:ext>
+            </a:extLst>
+          </p:cNvPr>
+          <p:cNvSpPr>
+            <a:spLocks noGrp="1"/>
+          </p:cNvSpPr>
+          <p:nvPr>
+            <p:ph type="title"/>
+          </p:nvPr>
+        </p:nvSpPr>
+        <p:spPr/>
+        <p:txBody>
+          <a:bodyPr/>
+          <a:lstStyle/>
+          <a:p>
+            <a:r>
+              <a:rPr kumimoji="1" lang="ja-JP" altLang="en-US" dirty="0"/>
+              <a:t>実現可能性の調査</a:t>
+            </a:r>
+          </a:p>
+        </p:txBody>
+      </p:sp>
+      <p:sp>
+        <p:nvSpPr>
+          <p:cNvPr id="3" name="コンテンツ プレースホルダー 2">
+            <a:extLst>
+              <a:ext uri="{FF2B5EF4-FFF2-40B4-BE49-F238E27FC236}">
+                <a16:creationId xmlns:a16="http://schemas.microsoft.com/office/drawing/2014/main" id="{21FF7843-62A5-3618-0DE5-223CA2C85B92}"/>
+              </a:ext>
+            </a:extLst>
+          </p:cNvPr>
+          <p:cNvSpPr>
+            <a:spLocks noGrp="1"/>
+          </p:cNvSpPr>
+          <p:nvPr>
+            <p:ph idx="1"/>
+          </p:nvPr>
+        </p:nvSpPr>
+        <p:spPr/>
+        <p:txBody>
+          <a:bodyPr/>
+          <a:lstStyle/>
+          <a:p>
+            <a:pPr marL="0" indent="0">
+              <a:buNone/>
+            </a:pPr>
+            <a:r>
+              <a:rPr kumimoji="1" lang="ja-JP" altLang="en-US" dirty="0"/>
+              <a:t>実現可能性というよりアプリ自体の完成はできるが</a:t>
+            </a:r>
+            <a:endParaRPr kumimoji="1" lang="en-US" altLang="ja-JP" dirty="0"/>
+          </a:p>
+          <a:p>
+            <a:pPr marL="0" indent="0">
+              <a:buNone/>
+            </a:pPr>
+            <a:r>
+              <a:rPr lang="ja-JP" altLang="en-US" dirty="0"/>
+              <a:t>手動カウントなど酔っ払いができる行為でないためそれに代わる代替案を模索中です</a:t>
+            </a:r>
+            <a:endParaRPr lang="en-US" altLang="ja-JP" dirty="0"/>
+          </a:p>
+          <a:p>
+            <a:pPr marL="0" indent="0">
+              <a:buNone/>
+            </a:pPr>
+            <a:r>
+              <a:rPr kumimoji="1" lang="ja-JP" altLang="en-US" dirty="0"/>
+              <a:t>→カウントは注文機器組み込むことで行うようにする</a:t>
+            </a:r>
+            <a:endParaRPr kumimoji="1" lang="en-US" altLang="ja-JP" dirty="0"/>
+          </a:p>
+          <a:p>
+            <a:pPr marL="0" indent="0">
+              <a:buNone/>
+            </a:pPr>
+            <a:endParaRPr lang="en-US" altLang="ja-JP" dirty="0"/>
+          </a:p>
+          <a:p>
+            <a:pPr marL="0" indent="0">
+              <a:buNone/>
+            </a:pPr>
+            <a:r>
+              <a:rPr kumimoji="1" lang="ja-JP" altLang="en-US" dirty="0"/>
+              <a:t>なのでアプリは注文アプリという形にする</a:t>
+            </a:r>
+          </a:p>
+        </p:txBody>
+      </p:sp>
+    </p:spTree>
+    <p:extLst>
+      <p:ext uri="{BB962C8B-B14F-4D97-AF65-F5344CB8AC3E}">
+        <p14:creationId xmlns:p14="http://schemas.microsoft.com/office/powerpoint/2010/main" val="899221438"/>
       </p:ext>
     </p:extLst>
   </p:cSld>

--- a/仕様書.pptx
+++ b/仕様書.pptx
@@ -12,6 +12,7 @@
     <p:sldId id="260" r:id="rId6"/>
     <p:sldId id="261" r:id="rId7"/>
     <p:sldId id="263" r:id="rId8"/>
+    <p:sldId id="264" r:id="rId9"/>
   </p:sldIdLst>
   <p:sldSz cx="12192000" cy="6858000"/>
   <p:notesSz cx="6858000" cy="9144000"/>
@@ -3762,7 +3763,7 @@
             </a:pPr>
             <a:r>
               <a:rPr kumimoji="1" lang="ja-JP" altLang="en-US" dirty="0"/>
-              <a:t>アル中危険察知アプリ</a:t>
+              <a:t>アル中危険察知注文アプリ</a:t>
             </a:r>
             <a:endParaRPr kumimoji="1" lang="en-US" altLang="ja-JP" dirty="0"/>
           </a:p>
@@ -3772,7 +3773,7 @@
             </a:pPr>
             <a:r>
               <a:rPr lang="ja-JP" altLang="en-US" dirty="0"/>
-              <a:t>↪一回の飲み会で飲んだ数を記録する</a:t>
+              <a:t>↪注文ごとに飲んだ数をカウント</a:t>
             </a:r>
             <a:endParaRPr lang="en-US" altLang="ja-JP" dirty="0"/>
           </a:p>
@@ -3782,8 +3783,15 @@
             </a:pPr>
             <a:r>
               <a:rPr kumimoji="1" lang="ja-JP" altLang="en-US" dirty="0"/>
-              <a:t>平均を出して自分のキャパがどのくらいか図れるようにする</a:t>
-            </a:r>
+              <a:t>平均となるデータからあなたが今危険かどうかを判定</a:t>
+            </a:r>
+            <a:endParaRPr kumimoji="1" lang="en-US" altLang="ja-JP" dirty="0"/>
+          </a:p>
+          <a:p>
+            <a:pPr marL="0" indent="0">
+              <a:buNone/>
+            </a:pPr>
+            <a:endParaRPr kumimoji="1" lang="ja-JP" altLang="en-US" dirty="0"/>
           </a:p>
         </p:txBody>
       </p:sp>
@@ -3874,7 +3882,14 @@
           <a:p>
             <a:r>
               <a:rPr kumimoji="1" lang="ja-JP" altLang="en-US" dirty="0"/>
-              <a:t>飲んだ数を数える</a:t>
+              <a:t>注文機能（皮だけ）</a:t>
+            </a:r>
+            <a:endParaRPr kumimoji="1" lang="en-US" altLang="ja-JP" dirty="0"/>
+          </a:p>
+          <a:p>
+            <a:r>
+              <a:rPr kumimoji="1" lang="ja-JP" altLang="en-US" dirty="0"/>
+              <a:t>注文から飲んだ数を数える</a:t>
             </a:r>
             <a:endParaRPr kumimoji="1" lang="en-US" altLang="ja-JP" dirty="0"/>
           </a:p>
@@ -3887,13 +3902,6 @@
           </a:p>
           <a:p>
             <a:r>
-              <a:rPr kumimoji="1" lang="ja-JP" altLang="en-US" dirty="0"/>
-              <a:t>手動カウント</a:t>
-            </a:r>
-            <a:endParaRPr kumimoji="1" lang="en-US" altLang="ja-JP" dirty="0"/>
-          </a:p>
-          <a:p>
-            <a:r>
               <a:rPr lang="ja-JP" altLang="en-US" dirty="0"/>
               <a:t>飲んだ数超過危険通知</a:t>
             </a:r>
@@ -3909,7 +3917,7 @@
           <a:p>
             <a:r>
               <a:rPr kumimoji="1" lang="ja-JP" altLang="en-US" dirty="0"/>
-              <a:t>カメラで飲んだ数を記録</a:t>
+              <a:t>カメラで飲んだ数を記録→実現性が低い＋</a:t>
             </a:r>
             <a:endParaRPr kumimoji="1" lang="en-US" altLang="ja-JP" dirty="0"/>
           </a:p>
@@ -4033,9 +4041,10 @@
           <a:p>
             <a:pPr algn="ctr"/>
             <a:r>
-              <a:rPr kumimoji="1" lang="ja-JP" altLang="en-US" dirty="0"/>
-              <a:t>飲んだ数カウント</a:t>
-            </a:r>
+              <a:rPr lang="ja-JP" altLang="en-US" dirty="0"/>
+              <a:t>注文表示</a:t>
+            </a:r>
+            <a:endParaRPr kumimoji="1" lang="ja-JP" altLang="en-US" dirty="0"/>
           </a:p>
         </p:txBody>
       </p:sp>
@@ -4081,7 +4090,7 @@
             <a:pPr algn="ctr"/>
             <a:r>
               <a:rPr kumimoji="1" lang="ja-JP" altLang="en-US" dirty="0"/>
-              <a:t>飲んだ数カレンダー</a:t>
+              <a:t>危険通知</a:t>
             </a:r>
           </a:p>
         </p:txBody>
@@ -4552,6 +4561,182 @@
     <p:extLst>
       <p:ext uri="{BB962C8B-B14F-4D97-AF65-F5344CB8AC3E}">
         <p14:creationId xmlns:p14="http://schemas.microsoft.com/office/powerpoint/2010/main" val="899221438"/>
+      </p:ext>
+    </p:extLst>
+  </p:cSld>
+  <p:clrMapOvr>
+    <a:masterClrMapping/>
+  </p:clrMapOvr>
+</p:sld>
+</file>
+
+<file path=ppt/slides/slide8.xml><?xml version="1.0" encoding="utf-8"?>
+<p:sld xmlns:a="http://schemas.openxmlformats.org/drawingml/2006/main" xmlns:r="http://schemas.openxmlformats.org/officeDocument/2006/relationships" xmlns:p="http://schemas.openxmlformats.org/presentationml/2006/main">
+  <p:cSld>
+    <p:spTree>
+      <p:nvGrpSpPr>
+        <p:cNvPr id="1" name="">
+          <a:extLst>
+            <a:ext uri="{FF2B5EF4-FFF2-40B4-BE49-F238E27FC236}">
+              <a16:creationId xmlns:a16="http://schemas.microsoft.com/office/drawing/2014/main" id="{CFAB59DB-46E2-DD4E-D7B2-914CA3182E44}"/>
+            </a:ext>
+          </a:extLst>
+        </p:cNvPr>
+        <p:cNvGrpSpPr/>
+        <p:nvPr/>
+      </p:nvGrpSpPr>
+      <p:grpSpPr>
+        <a:xfrm>
+          <a:off x="0" y="0"/>
+          <a:ext cx="0" cy="0"/>
+          <a:chOff x="0" y="0"/>
+          <a:chExt cx="0" cy="0"/>
+        </a:xfrm>
+      </p:grpSpPr>
+      <p:sp>
+        <p:nvSpPr>
+          <p:cNvPr id="2" name="タイトル 1">
+            <a:extLst>
+              <a:ext uri="{FF2B5EF4-FFF2-40B4-BE49-F238E27FC236}">
+                <a16:creationId xmlns:a16="http://schemas.microsoft.com/office/drawing/2014/main" id="{0BBD3883-E69B-1D2B-2048-9340DDC3B606}"/>
+              </a:ext>
+            </a:extLst>
+          </p:cNvPr>
+          <p:cNvSpPr>
+            <a:spLocks noGrp="1"/>
+          </p:cNvSpPr>
+          <p:nvPr>
+            <p:ph type="title"/>
+          </p:nvPr>
+        </p:nvSpPr>
+        <p:spPr/>
+        <p:txBody>
+          <a:bodyPr/>
+          <a:lstStyle/>
+          <a:p>
+            <a:r>
+              <a:rPr kumimoji="1" lang="ja-JP" altLang="en-US" dirty="0"/>
+              <a:t>実現可能性の調査</a:t>
+            </a:r>
+          </a:p>
+        </p:txBody>
+      </p:sp>
+      <p:sp>
+        <p:nvSpPr>
+          <p:cNvPr id="3" name="コンテンツ プレースホルダー 2">
+            <a:extLst>
+              <a:ext uri="{FF2B5EF4-FFF2-40B4-BE49-F238E27FC236}">
+                <a16:creationId xmlns:a16="http://schemas.microsoft.com/office/drawing/2014/main" id="{34D17CE4-3558-DC85-7F47-52010DC60433}"/>
+              </a:ext>
+            </a:extLst>
+          </p:cNvPr>
+          <p:cNvSpPr>
+            <a:spLocks noGrp="1"/>
+          </p:cNvSpPr>
+          <p:nvPr>
+            <p:ph idx="1"/>
+          </p:nvPr>
+        </p:nvSpPr>
+        <p:spPr/>
+        <p:txBody>
+          <a:bodyPr/>
+          <a:lstStyle/>
+          <a:p>
+            <a:pPr marL="0" indent="0">
+              <a:buNone/>
+            </a:pPr>
+            <a:r>
+              <a:rPr kumimoji="1" lang="ja-JP" altLang="en-US" dirty="0"/>
+              <a:t>注文アプリ自体は最悪皮だけでもでよいし</a:t>
+            </a:r>
+            <a:endParaRPr kumimoji="1" lang="en-US" altLang="ja-JP" dirty="0"/>
+          </a:p>
+          <a:p>
+            <a:pPr marL="0" indent="0">
+              <a:buNone/>
+            </a:pPr>
+            <a:r>
+              <a:rPr kumimoji="1" lang="en-US" altLang="ja-JP" dirty="0"/>
+              <a:t>EC</a:t>
+            </a:r>
+            <a:r>
+              <a:rPr kumimoji="1" lang="ja-JP" altLang="en-US" dirty="0"/>
+              <a:t>サイトなども作ったことがあるため中も機能も作れると思われる</a:t>
+            </a:r>
+            <a:endParaRPr kumimoji="1" lang="en-US" altLang="ja-JP" dirty="0"/>
+          </a:p>
+          <a:p>
+            <a:pPr marL="0" indent="0">
+              <a:buNone/>
+            </a:pPr>
+            <a:r>
+              <a:rPr kumimoji="1" lang="ja-JP" altLang="en-US" dirty="0"/>
+              <a:t>平均値←今のところは平均を調べてそれにしようとしているが</a:t>
+            </a:r>
+            <a:endParaRPr kumimoji="1" lang="en-US" altLang="ja-JP" dirty="0"/>
+          </a:p>
+          <a:p>
+            <a:pPr marL="0" indent="0">
+              <a:buNone/>
+            </a:pPr>
+            <a:r>
+              <a:rPr lang="ja-JP" altLang="en-US" dirty="0"/>
+              <a:t>　　　　人によって酒のキャパが違うのでそれをどうにかしたい</a:t>
+            </a:r>
+            <a:endParaRPr lang="en-US" altLang="ja-JP" dirty="0"/>
+          </a:p>
+          <a:p>
+            <a:pPr marL="0" indent="0">
+              <a:buNone/>
+            </a:pPr>
+            <a:r>
+              <a:rPr lang="ja-JP" altLang="en-US" dirty="0"/>
+              <a:t>　　　　→酒の種類によって度数も変わるためそれに</a:t>
+            </a:r>
+            <a:r>
+              <a:rPr lang="en-US" altLang="ja-JP" dirty="0"/>
+              <a:t>ml</a:t>
+            </a:r>
+            <a:r>
+              <a:rPr lang="ja-JP" altLang="en-US" dirty="0"/>
+              <a:t>度数含　　　　　　　　　　　　　　</a:t>
+            </a:r>
+            <a:r>
+              <a:rPr lang="en-US" altLang="ja-JP" dirty="0"/>
+              <a:t>		</a:t>
+            </a:r>
+            <a:r>
+              <a:rPr lang="ja-JP" altLang="en-US" dirty="0"/>
+              <a:t>めて対応する平均値にする</a:t>
+            </a:r>
+            <a:endParaRPr lang="en-US" altLang="ja-JP" dirty="0"/>
+          </a:p>
+          <a:p>
+            <a:pPr marL="0" indent="0">
+              <a:buNone/>
+            </a:pPr>
+            <a:r>
+              <a:rPr lang="ja-JP" altLang="en-US" dirty="0"/>
+              <a:t>追加機能は１１９などは</a:t>
+            </a:r>
+            <a:endParaRPr lang="en-US" altLang="ja-JP" dirty="0"/>
+          </a:p>
+          <a:p>
+            <a:pPr marL="0" indent="0">
+              <a:buNone/>
+            </a:pPr>
+            <a:r>
+              <a:rPr lang="ja-JP" altLang="en-US" dirty="0"/>
+              <a:t>　　　</a:t>
+            </a:r>
+            <a:endParaRPr kumimoji="1" lang="ja-JP" altLang="en-US" dirty="0"/>
+          </a:p>
+        </p:txBody>
+      </p:sp>
+    </p:spTree>
+    <p:extLst>
+      <p:ext uri="{BB962C8B-B14F-4D97-AF65-F5344CB8AC3E}">
+        <p14:creationId xmlns:p14="http://schemas.microsoft.com/office/powerpoint/2010/main" val="1924096074"/>
       </p:ext>
     </p:extLst>
   </p:cSld>
